--- a/slides/mapreduce/mapreduce_by_Mahmoud_Parsian/05_word_count_in_python.pptx
+++ b/slides/mapreduce/mapreduce_by_Mahmoud_Parsian/05_word_count_in_python.pptx
@@ -7551,7 +7551,7 @@
                 <a:latin typeface="Consolas" panose="020B0609020204030204" pitchFamily="49" charset="0"/>
                 <a:cs typeface="Consolas" panose="020B0609020204030204" pitchFamily="49" charset="0"/>
               </a:rPr>
-              <a:t>2. You can only run program in a single computer</a:t>
+              <a:t>2. You can only run the program on a single computer</a:t>
             </a:r>
           </a:p>
           <a:p>
@@ -7590,7 +7590,7 @@
                 <a:latin typeface="Consolas" panose="020B0609020204030204" pitchFamily="49" charset="0"/>
                 <a:cs typeface="Consolas" panose="020B0609020204030204" pitchFamily="49" charset="0"/>
               </a:rPr>
-              <a:t>of records): </a:t>
+              <a:t>of records).</a:t>
             </a:r>
           </a:p>
           <a:p>
@@ -8010,7 +8010,7 @@
                 <a:latin typeface="Consolas" panose="020B0609020204030204" pitchFamily="49" charset="0"/>
                 <a:cs typeface="Consolas" panose="020B0609020204030204" pitchFamily="49" charset="0"/>
               </a:rPr>
-              <a:t> Use </a:t>
+              <a:t>1. Use </a:t>
             </a:r>
             <a:r>
               <a:rPr lang="en-US" sz="3600" dirty="0">
@@ -8121,7 +8121,7 @@
                 <a:latin typeface="Consolas" panose="020B0609020204030204" pitchFamily="49" charset="0"/>
                 <a:cs typeface="Consolas" panose="020B0609020204030204" pitchFamily="49" charset="0"/>
               </a:rPr>
-              <a:t>Users memory/RAM as much as possible</a:t>
+              <a:t>Uses memory/RAM as much as possible</a:t>
             </a:r>
           </a:p>
           <a:p>
@@ -8244,7 +8244,7 @@
           <a:p>
             <a:r>
               <a:rPr lang="en-US" b="1" dirty="0"/>
-              <a:t>What is a Word Count Problem</a:t>
+              <a:t>What is the Word Count Problem?</a:t>
             </a:r>
           </a:p>
         </p:txBody>
